--- a/Assignment3_Loan/Loan_Presentation.pptx
+++ b/Assignment3_Loan/Loan_Presentation.pptx
@@ -13,9 +13,10 @@
     <p:sldId id="261" r:id="rId7"/>
     <p:sldId id="262" r:id="rId8"/>
     <p:sldId id="263" r:id="rId9"/>
+    <p:sldId id="264" r:id="rId10"/>
   </p:sldIdLst>
   <p:notesMasterIdLst>
-    <p:notesMasterId r:id="rId10"/>
+    <p:notesMasterId r:id="rId11"/>
   </p:notesMasterIdLst>
   <p:sldSz cx="12192000" cy="6858000"/>
   <p:notesSz cx="6858000" cy="12192000"/>
@@ -114,32 +115,33 @@
   <p:extLst>
     <p:ext uri="{521415D9-36F7-43E2-AB2F-B90AF26B5E84}">
       <p14:sectionLst xmlns:p14="http://schemas.microsoft.com/office/powerpoint/2010/main">
-        <p14:section name="Introduction" id="{76abef73-9832-cc34-2d76-25fb5ca25fc0}">
+        <p14:section name="Introduction" id="{bf31ef41-e566-4315-449b-782f73adae74}">
           <p14:sldIdLst>
             <p14:sldId id="256"/>
-          </p14:sldIdLst>
-        </p14:section>
-        <p14:section name="Process" id="{d3e92340-577a-9274-732b-c1ab2331eac4}">
-          <p14:sldIdLst>
             <p14:sldId id="257"/>
           </p14:sldIdLst>
         </p14:section>
-        <p14:section name="Task types, gateways and events" id="{2bed823e-a2b0-7432-379b-402d2fc5bda6}">
+        <p14:section name="Process" id="{4e4d1b71-0ace-c4fb-0a1f-d1b97fe02f1d}">
           <p14:sldIdLst>
             <p14:sldId id="258"/>
+          </p14:sldIdLst>
+        </p14:section>
+        <p14:section name="Task types, gateways and events" id="{94626242-844e-d9e7-068c-1625ee4d56b7}">
+          <p14:sldIdLst>
             <p14:sldId id="259"/>
             <p14:sldId id="260"/>
+            <p14:sldId id="261"/>
           </p14:sldIdLst>
         </p14:section>
-        <p14:section name="Critical and alternate paths" id="{6321d463-50be-097d-30c0-f9be6886a053}">
+        <p14:section name="Critical and alternate paths" id="{5711a2b0-82e2-8a56-c369-1ac57b7839ab}">
           <p14:sldIdLst>
-            <p14:sldId id="261"/>
             <p14:sldId id="262"/>
+            <p14:sldId id="263"/>
           </p14:sldIdLst>
         </p14:section>
-        <p14:section name="Summary" id="{4b8bc07f-35eb-2bb3-fdeb-689cc85b36fa}">
+        <p14:section name="Summary" id="{fe2c2434-2284-1442-2b3f-2107451b29dd}">
           <p14:sldIdLst>
-            <p14:sldId id="263"/>
+            <p14:sldId id="264"/>
           </p14:sldIdLst>
         </p14:section>
       </p14:sectionLst>
@@ -634,7 +636,7 @@
           <a:p>
             <a:r>
               <a:rPr lang="en-US" dirty="0"/>
-              <a:t>This is the full diagram. The applicant and the credit bureau are external, so they are separate pools connected by message flows, the dashed lines. Inside the bank pool there is one lane per role: Loan Officer, Core Banking System, Fraud and Compliance, Underwriter, and Operations. The dotted box at the top is the withdrawal event sub-process. All rejection reasons merge into one Send rejection task.</a:t>
+              <a:t>This is the question I chose. A bank processes personal and secured loans through document checks, identity verification, credit assessment, underwriting, the offer and disbursement. We had to show the normal flow and every point where an application can stall, be rejected or be cancelled. It starts when the applicant submits an application and ends when the loan is disbursed, or the application is rejected, withdrawn or lapsed. The right side lists the failure areas the question asked us to cover.</a:t>
             </a:r>
             <a:endParaRPr lang="en-US" dirty="0"/>
           </a:p>
@@ -722,7 +724,7 @@
           <a:p>
             <a:r>
               <a:rPr lang="en-US" dirty="0"/>
-              <a:t>Fifteen tasks of five types. Check eligibility is a business rule task: a DMN table decides using age, residency and documents. The three user tasks need human judgement and each has a form. Service tasks are automated calls: the credit score, the backup bureau, KYC, AML screening and disbursement. Send tasks send messages to the applicant, and Receive documents is a receive task because we wait for the applicant, with a seven-day timer attached.</a:t>
+              <a:t>This is the full diagram. The applicant and the credit bureau are external, so they are separate pools connected by message flows, the dashed lines. Inside the bank pool there is one lane per role: Loan Officer, Core Banking System, Fraud and Compliance, Underwriter, and Operations. The dotted box at the top is the withdrawal event sub-process. All rejection reasons merge into one Send rejection task.</a:t>
             </a:r>
             <a:endParaRPr lang="en-US" dirty="0"/>
           </a:p>
@@ -810,7 +812,7 @@
           <a:p>
             <a:r>
               <a:rPr lang="en-US" dirty="0"/>
-              <a:t>Three gateway types. Exclusive gateways make decisions: eligible, checks passed, fraud, approved and retry; they also merge paths. The parallel gateway runs the credit score, KYC and AML checks at the same time, and the join waits for all three. The pass or fail decision is taken after the join, because if one branch rejected on its own the join would wait forever. The event-based gateway after the offer waits for whichever happens first: the signed agreement, a decline, or the fifteen-day timer.</a:t>
+              <a:t>Fifteen tasks of five types. Check eligibility is a business rule task: a DMN table decides using age, residency and documents. The three user tasks need human judgement and each has a form. Service tasks are automated calls: the credit score, the backup bureau, KYC, AML screening and disbursement. Send tasks send messages to the applicant, and Receive documents is a receive task because we wait for the applicant, with a seven-day timer attached.</a:t>
             </a:r>
             <a:endParaRPr lang="en-US" dirty="0"/>
           </a:p>
@@ -898,7 +900,7 @@
           <a:p>
             <a:r>
               <a:rPr lang="en-US" dirty="0"/>
-              <a:t>Six intermediate events. Three boundary events: a seven-day timer on Receive documents, an error event on Get credit score when the bureau is down, and an error event on Disburse funds when the payment fails. Three intermediate catch events follow the event-based gateway: two message events, signed agreement and offer declined, and one fifteen-day timer.</a:t>
+              <a:t>Three gateway types. Exclusive gateways make decisions: eligible, checks passed, fraud, approved and retry; they also merge paths. The parallel gateway runs the credit score, KYC and AML checks at the same time, and the join waits for all three. The pass or fail decision is taken after the join, because if one branch rejected on its own the join would wait forever. The event-based gateway after the offer waits for whichever happens first: the signed agreement, a decline, or the fifteen-day timer.</a:t>
             </a:r>
             <a:endParaRPr lang="en-US" dirty="0"/>
           </a:p>
@@ -986,7 +988,7 @@
           <a:p>
             <a:r>
               <a:rPr lang="en-US" dirty="0"/>
-              <a:t>The critical path is the happy path. Application received, check eligibility, the three checks in parallel, underwriting, send the offer, the signed agreement comes back, then funds are disbursed and a confirmation is sent. Every gateway takes its normal branch.</a:t>
+              <a:t>Six intermediate events. Three boundary events: a seven-day timer on Receive documents, an error event on Get credit score when the bureau is down, and an error event on Disburse funds when the payment fails. Three intermediate catch events follow the event-based gateway: two message events, signed agreement and offer declined, and one fifteen-day timer.</a:t>
             </a:r>
             <a:endParaRPr lang="en-US" dirty="0"/>
           </a:p>
@@ -1074,7 +1076,7 @@
           <a:p>
             <a:r>
               <a:rPr lang="en-US" dirty="0"/>
-              <a:t>Ten alternate paths, each solved inside the diagram. Four of them, ineligible, KYC failed, underwriter declined, and missing documents after the timeout, end without disbursement. The bureau outage recovers with a backup bureau instead of failing. Confirmed fraud uses a terminate end event to stop everything at once. Withdrawal can happen at any stage, so it is an interrupting event sub-process rather than a boundary event on every task.</a:t>
+              <a:t>The critical path is the happy path. Application received, check eligibility, the three checks in parallel, underwriting, send the offer, the signed agreement comes back, then funds are disbursed and a confirmation is sent. Every gateway takes its normal branch.</a:t>
             </a:r>
             <a:endParaRPr lang="en-US" dirty="0"/>
           </a:p>
@@ -1162,7 +1164,7 @@
           <a:p>
             <a:r>
               <a:rPr lang="en-US" dirty="0"/>
-              <a:t>To summarise: five task types, three gateway types, six intermediate events, one critical path and ten alternate paths. Every failure area the question lists is handled inside the model. Thank you, I am happy to take questions.</a:t>
+              <a:t>Ten alternate paths, each solved inside the diagram. Four of them, ineligible, KYC failed, underwriter declined, and missing documents after the timeout, end without disbursement. The bureau outage recovers with a backup bureau instead of failing. Confirmed fraud uses a terminate end event to stop everything at once. Withdrawal can happen at any stage, so it is an interrupting event sub-process rather than a boundary event on every task.</a:t>
             </a:r>
             <a:endParaRPr lang="en-US" dirty="0"/>
           </a:p>
@@ -1186,6 +1188,94 @@
             <a:fld id="{F7021451-1387-4CA6-816F-3879F97B5CBC}" type="slidenum">
               <a:rPr lang="en-US"/>
               <a:t>8</a:t>
+            </a:fld>
+            <a:endParaRPr lang="en-US"/>
+          </a:p>
+        </p:txBody>
+      </p:sp>
+    </p:spTree>
+    <p:extLst>
+      <p:ext uri="{BB962C8B-B14F-4D97-AF65-F5344CB8AC3E}">
+        <p14:creationId xmlns:p14="http://schemas.microsoft.com/office/powerpoint/2010/main" val="1024086991"/>
+      </p:ext>
+    </p:extLst>
+  </p:cSld>
+  <p:clrMapOvr>
+    <a:masterClrMapping/>
+  </p:clrMapOvr>
+</p:notes>
+</file>
+
+<file path=ppt/notesSlides/notesSlide9.xml><?xml version="1.0" encoding="utf-8"?>
+<p:notes xmlns:a="http://schemas.openxmlformats.org/drawingml/2006/main" xmlns:r="http://schemas.openxmlformats.org/officeDocument/2006/relationships" xmlns:p="http://schemas.openxmlformats.org/presentationml/2006/main">
+  <p:cSld>
+    <p:spTree>
+      <p:nvGrpSpPr>
+        <p:cNvPr id="1" name=""/>
+        <p:cNvGrpSpPr/>
+        <p:nvPr/>
+      </p:nvGrpSpPr>
+      <p:grpSpPr>
+        <a:xfrm>
+          <a:off x="0" y="0"/>
+          <a:ext cx="0" cy="0"/>
+          <a:chOff x="0" y="0"/>
+          <a:chExt cx="0" cy="0"/>
+        </a:xfrm>
+      </p:grpSpPr>
+      <p:sp>
+        <p:nvSpPr>
+          <p:cNvPr id="2" name="Slide Image Placeholder 1"/>
+          <p:cNvSpPr>
+            <a:spLocks noGrp="1" noRot="1" noChangeAspect="1"/>
+          </p:cNvSpPr>
+          <p:nvPr>
+            <p:ph type="sldImg"/>
+          </p:nvPr>
+        </p:nvSpPr>
+        <p:spPr/>
+      </p:sp>
+      <p:sp>
+        <p:nvSpPr>
+          <p:cNvPr id="3" name="Notes Placeholder 2"/>
+          <p:cNvSpPr>
+            <a:spLocks noGrp="1"/>
+          </p:cNvSpPr>
+          <p:nvPr>
+            <p:ph type="body" idx="1"/>
+          </p:nvPr>
+        </p:nvSpPr>
+        <p:spPr/>
+        <p:txBody>
+          <a:bodyPr/>
+          <a:lstStyle/>
+          <a:p>
+            <a:r>
+              <a:rPr lang="en-US" dirty="0"/>
+              <a:t>To summarise: five task types, three gateway types, six intermediate events, one critical path and ten alternate paths. Every failure area the question lists is handled inside the model. Thank you.</a:t>
+            </a:r>
+            <a:endParaRPr lang="en-US" dirty="0"/>
+          </a:p>
+        </p:txBody>
+      </p:sp>
+      <p:sp>
+        <p:nvSpPr>
+          <p:cNvPr id="4" name="Slide Number Placeholder 3"/>
+          <p:cNvSpPr>
+            <a:spLocks noGrp="1"/>
+          </p:cNvSpPr>
+          <p:nvPr>
+            <p:ph type="sldNum" sz="quarter" idx="10"/>
+          </p:nvPr>
+        </p:nvSpPr>
+        <p:spPr/>
+        <p:txBody>
+          <a:bodyPr/>
+          <a:lstStyle/>
+          <a:p>
+            <a:fld id="{F7021451-1387-4CA6-816F-3879F97B5CBC}" type="slidenum">
+              <a:rPr lang="en-US"/>
+              <a:t>9</a:t>
             </a:fld>
             <a:endParaRPr lang="en-US"/>
           </a:p>
@@ -2207,7 +2297,7 @@
                 <a:ea typeface="Cambria" pitchFamily="34" charset="-122"/>
                 <a:cs typeface="Cambria" pitchFamily="34" charset="-120"/>
               </a:rPr>
-              <a:t>Process overview</a:t>
+              <a:t>The question</a:t>
             </a:r>
             <a:endParaRPr lang="en-US" sz="3200" dirty="0"/>
           </a:p>
@@ -2221,8 +2311,71 @@
         </p:nvSpPr>
         <p:spPr>
           <a:xfrm>
-            <a:off x="548640" y="1051560"/>
-            <a:ext cx="11064240" cy="365760"/>
+            <a:off x="548640" y="1234440"/>
+            <a:ext cx="6126480" cy="1463040"/>
+          </a:xfrm>
+          <a:prstGeom prst="rect">
+            <a:avLst/>
+          </a:prstGeom>
+          <a:noFill/>
+          <a:ln/>
+        </p:spPr>
+        <p:txBody>
+          <a:bodyPr wrap="square" lIns="0" tIns="0" rIns="0" bIns="0" rtlCol="0" anchor="t"/>
+          <a:lstStyle/>
+          <a:p>
+            <a:pPr indent="0" marL="0">
+              <a:buNone/>
+            </a:pPr>
+            <a:r>
+              <a:rPr lang="en-US" sz="1600" dirty="0">
+                <a:solidFill>
+                  <a:srgbClr val="3A4659"/>
+                </a:solidFill>
+              </a:rPr>
+              <a:t>A bank handles personal and secured loan applications. Each one passes through document checks, identity verification, credit assessment, underwriting, offer and acceptance, and disbursement. Show the normal approval flow and every point where an application can stall, be rejected or be cancelled.</a:t>
+            </a:r>
+            <a:endParaRPr lang="en-US" sz="1600" dirty="0"/>
+          </a:p>
+        </p:txBody>
+      </p:sp>
+      <p:sp>
+        <p:nvSpPr>
+          <p:cNvPr id="4" name="start end box"/>
+          <p:cNvSpPr/>
+          <p:nvPr/>
+        </p:nvSpPr>
+        <p:spPr>
+          <a:xfrm>
+            <a:off x="548640" y="2834640"/>
+            <a:ext cx="6126480" cy="1143000"/>
+          </a:xfrm>
+          <a:prstGeom prst="roundRect">
+            <a:avLst>
+              <a:gd name="adj" fmla="val 8000"/>
+            </a:avLst>
+          </a:prstGeom>
+          <a:solidFill>
+            <a:srgbClr val="EEF1F5"/>
+          </a:solidFill>
+          <a:ln w="12700">
+            <a:solidFill>
+              <a:srgbClr val="EEF1F5"/>
+            </a:solidFill>
+            <a:prstDash val="solid"/>
+          </a:ln>
+        </p:spPr>
+      </p:sp>
+      <p:sp>
+        <p:nvSpPr>
+          <p:cNvPr id="5" name="Text 3"/>
+          <p:cNvSpPr txBox="1"/>
+          <p:nvPr/>
+        </p:nvSpPr>
+        <p:spPr>
+          <a:xfrm>
+            <a:off x="777240" y="2926080"/>
+            <a:ext cx="5760720" cy="960120"/>
           </a:xfrm>
           <a:prstGeom prst="rect">
             <a:avLst/>
@@ -2235,69 +2388,494 @@
           <a:lstStyle/>
           <a:p>
             <a:pPr indent="0" marL="0">
+              <a:spcAft>
+                <a:spcPts val="400"/>
+              </a:spcAft>
               <a:buNone/>
+            </a:pPr>
+            <a:r>
+              <a:rPr lang="en-US" sz="1500" b="1" dirty="0">
+                <a:solidFill>
+                  <a:srgbClr val="13203A"/>
+                </a:solidFill>
+              </a:rPr>
+              <a:t>Starts: </a:t>
+            </a:r>
+            <a:pPr indent="0" marL="0">
+              <a:spcAft>
+                <a:spcPts val="400"/>
+              </a:spcAft>
+              <a:buNone/>
+            </a:pPr>
+            <a:r>
+              <a:rPr lang="en-US" sz="1500" dirty="0">
+                <a:solidFill>
+                  <a:srgbClr val="3A4659"/>
+                </a:solidFill>
+              </a:rPr>
+              <a:t>an applicant submits a loan application with documents</a:t>
+            </a:r>
+            <a:endParaRPr lang="en-US" sz="1500" dirty="0"/>
+          </a:p>
+          <a:p>
+            <a:pPr indent="0" marL="0">
+              <a:spcAft>
+                <a:spcPts val="400"/>
+              </a:spcAft>
+              <a:buNone/>
+            </a:pPr>
+            <a:r>
+              <a:rPr lang="en-US" sz="1500" b="1" dirty="0">
+                <a:solidFill>
+                  <a:srgbClr val="13203A"/>
+                </a:solidFill>
+              </a:rPr>
+              <a:t>Ends: </a:t>
+            </a:r>
+            <a:pPr indent="0" marL="0">
+              <a:spcAft>
+                <a:spcPts val="400"/>
+              </a:spcAft>
+              <a:buNone/>
+            </a:pPr>
+            <a:r>
+              <a:rPr lang="en-US" sz="1500" dirty="0">
+                <a:solidFill>
+                  <a:srgbClr val="3A4659"/>
+                </a:solidFill>
+              </a:rPr>
+              <a:t>the loan is disbursed, or the application is rejected, withdrawn or lapsed</a:t>
+            </a:r>
+            <a:endParaRPr lang="en-US" sz="1500" dirty="0"/>
+          </a:p>
+        </p:txBody>
+      </p:sp>
+      <p:sp>
+        <p:nvSpPr>
+          <p:cNvPr id="6" name="Text 4"/>
+          <p:cNvSpPr txBox="1"/>
+          <p:nvPr/>
+        </p:nvSpPr>
+        <p:spPr>
+          <a:xfrm>
+            <a:off x="548640" y="4206240"/>
+            <a:ext cx="6126480" cy="320040"/>
+          </a:xfrm>
+          <a:prstGeom prst="rect">
+            <a:avLst/>
+          </a:prstGeom>
+          <a:noFill/>
+          <a:ln/>
+        </p:spPr>
+        <p:txBody>
+          <a:bodyPr wrap="square" lIns="0" tIns="0" rIns="0" bIns="0" rtlCol="0" anchor="ctr"/>
+          <a:lstStyle/>
+          <a:p>
+            <a:pPr indent="0" marL="0">
+              <a:buNone/>
+            </a:pPr>
+            <a:r>
+              <a:rPr lang="en-US" sz="1600" b="1" dirty="0">
+                <a:solidFill>
+                  <a:srgbClr val="13203A"/>
+                </a:solidFill>
+              </a:rPr>
+              <a:t>Participants</a:t>
+            </a:r>
+            <a:endParaRPr lang="en-US" sz="1600" dirty="0"/>
+          </a:p>
+        </p:txBody>
+      </p:sp>
+      <p:sp>
+        <p:nvSpPr>
+          <p:cNvPr id="7" name="Text 5"/>
+          <p:cNvSpPr txBox="1"/>
+          <p:nvPr/>
+        </p:nvSpPr>
+        <p:spPr>
+          <a:xfrm>
+            <a:off x="548640" y="4572000"/>
+            <a:ext cx="6126480" cy="1463040"/>
+          </a:xfrm>
+          <a:prstGeom prst="rect">
+            <a:avLst/>
+          </a:prstGeom>
+          <a:noFill/>
+          <a:ln/>
+        </p:spPr>
+        <p:txBody>
+          <a:bodyPr wrap="square" lIns="0" tIns="0" rIns="0" bIns="0" rtlCol="0" anchor="t"/>
+          <a:lstStyle/>
+          <a:p>
+            <a:pPr indent="0" marL="0">
+              <a:buNone/>
+            </a:pPr>
+            <a:r>
+              <a:rPr lang="en-US" sz="1500" dirty="0">
+                <a:solidFill>
+                  <a:srgbClr val="3A4659"/>
+                </a:solidFill>
+              </a:rPr>
+              <a:t>Applicant · Loan Officer · Underwriter / Credit Committee · Fraud &amp; Compliance Team · Credit Bureau (external) · Operations / Disbursement · Core Banking System</a:t>
+            </a:r>
+            <a:endParaRPr lang="en-US" sz="1500" dirty="0"/>
+          </a:p>
+        </p:txBody>
+      </p:sp>
+      <p:sp>
+        <p:nvSpPr>
+          <p:cNvPr id="8" name="tasks card"/>
+          <p:cNvSpPr/>
+          <p:nvPr/>
+        </p:nvSpPr>
+        <p:spPr>
+          <a:xfrm>
+            <a:off x="6995160" y="1234440"/>
+            <a:ext cx="4617720" cy="2148840"/>
+          </a:xfrm>
+          <a:prstGeom prst="roundRect">
+            <a:avLst>
+              <a:gd name="adj" fmla="val 5106"/>
+            </a:avLst>
+          </a:prstGeom>
+          <a:solidFill>
+            <a:srgbClr val="13203A"/>
+          </a:solidFill>
+          <a:ln w="12700">
+            <a:solidFill>
+              <a:srgbClr val="13203A"/>
+            </a:solidFill>
+            <a:prstDash val="solid"/>
+          </a:ln>
+        </p:spPr>
+      </p:sp>
+      <p:sp>
+        <p:nvSpPr>
+          <p:cNvPr id="9" name="Text 7"/>
+          <p:cNvSpPr txBox="1"/>
+          <p:nvPr/>
+        </p:nvSpPr>
+        <p:spPr>
+          <a:xfrm>
+            <a:off x="7269480" y="1371600"/>
+            <a:ext cx="4114800" cy="365760"/>
+          </a:xfrm>
+          <a:prstGeom prst="rect">
+            <a:avLst/>
+          </a:prstGeom>
+          <a:noFill/>
+          <a:ln/>
+        </p:spPr>
+        <p:txBody>
+          <a:bodyPr wrap="square" lIns="0" tIns="0" rIns="0" bIns="0" rtlCol="0" anchor="ctr"/>
+          <a:lstStyle/>
+          <a:p>
+            <a:pPr indent="0" marL="0">
+              <a:buNone/>
+            </a:pPr>
+            <a:r>
+              <a:rPr lang="en-US" sz="1600" b="1" dirty="0">
+                <a:solidFill>
+                  <a:srgbClr val="8DB3EC"/>
+                </a:solidFill>
+              </a:rPr>
+              <a:t>What we had to do</a:t>
+            </a:r>
+            <a:endParaRPr lang="en-US" sz="1600" dirty="0"/>
+          </a:p>
+        </p:txBody>
+      </p:sp>
+      <p:sp>
+        <p:nvSpPr>
+          <p:cNvPr id="10" name="Text 8"/>
+          <p:cNvSpPr txBox="1"/>
+          <p:nvPr/>
+        </p:nvSpPr>
+        <p:spPr>
+          <a:xfrm>
+            <a:off x="7269480" y="1783080"/>
+            <a:ext cx="4160520" cy="1463040"/>
+          </a:xfrm>
+          <a:prstGeom prst="rect">
+            <a:avLst/>
+          </a:prstGeom>
+          <a:noFill/>
+          <a:ln/>
+        </p:spPr>
+        <p:txBody>
+          <a:bodyPr wrap="square" lIns="0" tIns="0" rIns="0" bIns="0" rtlCol="0" anchor="t"/>
+          <a:lstStyle/>
+          <a:p>
+            <a:pPr marL="342900" indent="-342900">
+              <a:spcAft>
+                <a:spcPts val="400"/>
+              </a:spcAft>
+              <a:buSzPct val="100000"/>
+              <a:buFont typeface="+mj-lt"/>
+              <a:buAutoNum type="arabicPeriod" startAt="1"/>
+            </a:pPr>
+            <a:r>
+              <a:rPr lang="en-US" sz="1500" dirty="0">
+                <a:solidFill>
+                  <a:srgbClr val="FFFFFF"/>
+                </a:solidFill>
+              </a:rPr>
+              <a:t>Draw the happy path</a:t>
+            </a:r>
+            <a:endParaRPr lang="en-US" sz="1500" dirty="0"/>
+          </a:p>
+          <a:p>
+            <a:pPr marL="342900" indent="-342900">
+              <a:spcAft>
+                <a:spcPts val="400"/>
+              </a:spcAft>
+              <a:buSzPct val="100000"/>
+              <a:buFont typeface="+mj-lt"/>
+              <a:buAutoNum type="arabicPeriod" startAt="1"/>
+            </a:pPr>
+            <a:r>
+              <a:rPr lang="en-US" sz="1500" dirty="0">
+                <a:solidFill>
+                  <a:srgbClr val="FFFFFF"/>
+                </a:solidFill>
+              </a:rPr>
+              <a:t>List the failure paths</a:t>
+            </a:r>
+            <a:endParaRPr lang="en-US" sz="1500" dirty="0"/>
+          </a:p>
+          <a:p>
+            <a:pPr marL="342900" indent="-342900">
+              <a:spcAft>
+                <a:spcPts val="400"/>
+              </a:spcAft>
+              <a:buSzPct val="100000"/>
+              <a:buFont typeface="+mj-lt"/>
+              <a:buAutoNum type="arabicPeriod" startAt="1"/>
+            </a:pPr>
+            <a:r>
+              <a:rPr lang="en-US" sz="1500" dirty="0">
+                <a:solidFill>
+                  <a:srgbClr val="FFFFFF"/>
+                </a:solidFill>
+              </a:rPr>
+              <a:t>Solve each failure inside the diagram</a:t>
+            </a:r>
+            <a:endParaRPr lang="en-US" sz="1500" dirty="0"/>
+          </a:p>
+          <a:p>
+            <a:pPr marL="342900" indent="-342900">
+              <a:spcAft>
+                <a:spcPts val="400"/>
+              </a:spcAft>
+              <a:buSzPct val="100000"/>
+              <a:buFont typeface="+mj-lt"/>
+              <a:buAutoNum type="arabicPeriod" startAt="1"/>
+            </a:pPr>
+            <a:r>
+              <a:rPr lang="en-US" sz="1500" dirty="0">
+                <a:solidFill>
+                  <a:srgbClr val="FFFFFF"/>
+                </a:solidFill>
+              </a:rPr>
+              <a:t>Justify task types and gateways</a:t>
+            </a:r>
+            <a:endParaRPr lang="en-US" sz="1500" dirty="0"/>
+          </a:p>
+        </p:txBody>
+      </p:sp>
+      <p:sp>
+        <p:nvSpPr>
+          <p:cNvPr id="11" name="failure areas card"/>
+          <p:cNvSpPr/>
+          <p:nvPr/>
+        </p:nvSpPr>
+        <p:spPr>
+          <a:xfrm>
+            <a:off x="6995160" y="3566160"/>
+            <a:ext cx="4617720" cy="2560320"/>
+          </a:xfrm>
+          <a:prstGeom prst="roundRect">
+            <a:avLst>
+              <a:gd name="adj" fmla="val 4286"/>
+            </a:avLst>
+          </a:prstGeom>
+          <a:solidFill>
+            <a:srgbClr val="EEF1F5"/>
+          </a:solidFill>
+          <a:ln w="12700">
+            <a:solidFill>
+              <a:srgbClr val="EEF1F5"/>
+            </a:solidFill>
+            <a:prstDash val="solid"/>
+          </a:ln>
+        </p:spPr>
+      </p:sp>
+      <p:sp>
+        <p:nvSpPr>
+          <p:cNvPr id="12" name="Text 10"/>
+          <p:cNvSpPr txBox="1"/>
+          <p:nvPr/>
+        </p:nvSpPr>
+        <p:spPr>
+          <a:xfrm>
+            <a:off x="7269480" y="3703320"/>
+            <a:ext cx="4114800" cy="365760"/>
+          </a:xfrm>
+          <a:prstGeom prst="rect">
+            <a:avLst/>
+          </a:prstGeom>
+          <a:noFill/>
+          <a:ln/>
+        </p:spPr>
+        <p:txBody>
+          <a:bodyPr wrap="square" lIns="0" tIns="0" rIns="0" bIns="0" rtlCol="0" anchor="ctr"/>
+          <a:lstStyle/>
+          <a:p>
+            <a:pPr indent="0" marL="0">
+              <a:buNone/>
+            </a:pPr>
+            <a:r>
+              <a:rPr lang="en-US" sz="1600" b="1" dirty="0">
+                <a:solidFill>
+                  <a:srgbClr val="2E5EAA"/>
+                </a:solidFill>
+              </a:rPr>
+              <a:t>Where to look for failures</a:t>
+            </a:r>
+            <a:endParaRPr lang="en-US" sz="1600" dirty="0"/>
+          </a:p>
+        </p:txBody>
+      </p:sp>
+      <p:sp>
+        <p:nvSpPr>
+          <p:cNvPr id="13" name="Text 11"/>
+          <p:cNvSpPr txBox="1"/>
+          <p:nvPr/>
+        </p:nvSpPr>
+        <p:spPr>
+          <a:xfrm>
+            <a:off x="7269480" y="4114800"/>
+            <a:ext cx="4160520" cy="1920240"/>
+          </a:xfrm>
+          <a:prstGeom prst="rect">
+            <a:avLst/>
+          </a:prstGeom>
+          <a:noFill/>
+          <a:ln/>
+        </p:spPr>
+        <p:txBody>
+          <a:bodyPr wrap="square" lIns="0" tIns="0" rIns="0" bIns="0" rtlCol="0" anchor="t"/>
+          <a:lstStyle/>
+          <a:p>
+            <a:pPr marL="342900" indent="-342900">
+              <a:spcAft>
+                <a:spcPts val="300"/>
+              </a:spcAft>
+              <a:buSzPct val="100000"/>
+              <a:buChar char="•"/>
             </a:pPr>
             <a:r>
               <a:rPr lang="en-US" sz="1400" dirty="0">
                 <a:solidFill>
-                  <a:srgbClr val="5D6778"/>
+                  <a:srgbClr val="3A4659"/>
                 </a:solidFill>
               </a:rPr>
-              <a:t>Pools: Applicant, Credit Bureau   ·   Lanes: Loan Officer, Core Banking, Fraud &amp; Compliance, Underwriter, Operations</a:t>
+              <a:t>Document and identity problems</a:t>
             </a:r>
             <a:endParaRPr lang="en-US" sz="1400" dirty="0"/>
           </a:p>
+          <a:p>
+            <a:pPr marL="342900" indent="-342900">
+              <a:spcAft>
+                <a:spcPts val="300"/>
+              </a:spcAft>
+              <a:buSzPct val="100000"/>
+              <a:buChar char="•"/>
+            </a:pPr>
+            <a:r>
+              <a:rPr lang="en-US" sz="1400" dirty="0">
+                <a:solidFill>
+                  <a:srgbClr val="3A4659"/>
+                </a:solidFill>
+              </a:rPr>
+              <a:t>Fraud, AML or sanctions flags</a:t>
+            </a:r>
+            <a:endParaRPr lang="en-US" sz="1400" dirty="0"/>
+          </a:p>
+          <a:p>
+            <a:pPr marL="342900" indent="-342900">
+              <a:spcAft>
+                <a:spcPts val="300"/>
+              </a:spcAft>
+              <a:buSzPct val="100000"/>
+              <a:buChar char="•"/>
+            </a:pPr>
+            <a:r>
+              <a:rPr lang="en-US" sz="1400" dirty="0">
+                <a:solidFill>
+                  <a:srgbClr val="3A4659"/>
+                </a:solidFill>
+              </a:rPr>
+              <a:t>Credit bureau unavailable</a:t>
+            </a:r>
+            <a:endParaRPr lang="en-US" sz="1400" dirty="0"/>
+          </a:p>
+          <a:p>
+            <a:pPr marL="342900" indent="-342900">
+              <a:spcAft>
+                <a:spcPts val="300"/>
+              </a:spcAft>
+              <a:buSzPct val="100000"/>
+              <a:buChar char="•"/>
+            </a:pPr>
+            <a:r>
+              <a:rPr lang="en-US" sz="1400" dirty="0">
+                <a:solidFill>
+                  <a:srgbClr val="3A4659"/>
+                </a:solidFill>
+              </a:rPr>
+              <a:t>Credit, income, collateral outcomes</a:t>
+            </a:r>
+            <a:endParaRPr lang="en-US" sz="1400" dirty="0"/>
+          </a:p>
+          <a:p>
+            <a:pPr marL="342900" indent="-342900">
+              <a:spcAft>
+                <a:spcPts val="300"/>
+              </a:spcAft>
+              <a:buSzPct val="100000"/>
+              <a:buChar char="•"/>
+            </a:pPr>
+            <a:r>
+              <a:rPr lang="en-US" sz="1400" dirty="0">
+                <a:solidFill>
+                  <a:srgbClr val="3A4659"/>
+                </a:solidFill>
+              </a:rPr>
+              <a:t>Timeouts, withdrawal and refusal</a:t>
+            </a:r>
+            <a:endParaRPr lang="en-US" sz="1400" dirty="0"/>
+          </a:p>
+          <a:p>
+            <a:pPr marL="342900" indent="-342900">
+              <a:spcAft>
+                <a:spcPts val="300"/>
+              </a:spcAft>
+              <a:buSzPct val="100000"/>
+              <a:buChar char="•"/>
+            </a:pPr>
+            <a:r>
+              <a:rPr lang="en-US" sz="1400" dirty="0">
+                <a:solidFill>
+                  <a:srgbClr val="3A4659"/>
+                </a:solidFill>
+              </a:rPr>
+              <a:t>Disbursement failures</a:t>
+            </a:r>
+            <a:endParaRPr lang="en-US" sz="1400" dirty="0"/>
+          </a:p>
         </p:txBody>
       </p:sp>
-      <p:sp>
-        <p:nvSpPr>
-          <p:cNvPr id="4" name="diagram frame"/>
-          <p:cNvSpPr/>
-          <p:nvPr/>
-        </p:nvSpPr>
-        <p:spPr>
-          <a:xfrm>
-            <a:off x="1541953" y="1463040"/>
-            <a:ext cx="9107790" cy="4937760"/>
-          </a:xfrm>
-          <a:prstGeom prst="rect">
-            <a:avLst/>
-          </a:prstGeom>
-          <a:solidFill>
-            <a:srgbClr val="FFFFFF"/>
-          </a:solidFill>
-          <a:ln w="9525">
-            <a:solidFill>
-              <a:srgbClr val="DFE3EA"/>
-            </a:solidFill>
-            <a:prstDash val="solid"/>
-          </a:ln>
-        </p:spPr>
-      </p:sp>
-      <p:pic>
-        <p:nvPicPr>
-          <p:cNvPr id="5" name="Image 0" descr="BPMN diagram of the loan process: a bank pool with five lanes between the Applicant and Credit Bureau pools">    </p:cNvPr>
-          <p:cNvPicPr>
-            <a:picLocks noChangeAspect="1"/>
-          </p:cNvPicPr>
-          <p:nvPr/>
-        </p:nvPicPr>
-        <p:blipFill>
-          <a:blip r:embed="rId1"/>
-          <a:stretch>
-            <a:fillRect/>
-          </a:stretch>
-        </p:blipFill>
-        <p:spPr>
-          <a:xfrm>
-            <a:off x="1633393" y="1554480"/>
-            <a:ext cx="8924910" cy="4754880"/>
-          </a:xfrm>
-          <a:prstGeom prst="rect">
-            <a:avLst/>
-          </a:prstGeom>
-        </p:spPr>
-      </p:pic>
       <p:sp>
         <p:nvSpPr>
           <p:cNvPr id="25" name="Slide Number Placeholder 0"/>
@@ -2406,6 +2984,205 @@
                 <a:ea typeface="Cambria" pitchFamily="34" charset="-122"/>
                 <a:cs typeface="Cambria" pitchFamily="34" charset="-120"/>
               </a:rPr>
+              <a:t>Process overview</a:t>
+            </a:r>
+            <a:endParaRPr lang="en-US" sz="3200" dirty="0"/>
+          </a:p>
+        </p:txBody>
+      </p:sp>
+      <p:sp>
+        <p:nvSpPr>
+          <p:cNvPr id="3" name="Text 1"/>
+          <p:cNvSpPr txBox="1"/>
+          <p:nvPr/>
+        </p:nvSpPr>
+        <p:spPr>
+          <a:xfrm>
+            <a:off x="548640" y="1051560"/>
+            <a:ext cx="11064240" cy="365760"/>
+          </a:xfrm>
+          <a:prstGeom prst="rect">
+            <a:avLst/>
+          </a:prstGeom>
+          <a:noFill/>
+          <a:ln/>
+        </p:spPr>
+        <p:txBody>
+          <a:bodyPr wrap="square" lIns="0" tIns="0" rIns="0" bIns="0" rtlCol="0" anchor="ctr"/>
+          <a:lstStyle/>
+          <a:p>
+            <a:pPr indent="0" marL="0">
+              <a:buNone/>
+            </a:pPr>
+            <a:r>
+              <a:rPr lang="en-US" sz="1400" dirty="0">
+                <a:solidFill>
+                  <a:srgbClr val="5D6778"/>
+                </a:solidFill>
+              </a:rPr>
+              <a:t>Pools: Applicant, Credit Bureau   ·   Lanes: Loan Officer, Core Banking, Fraud &amp; Compliance, Underwriter, Operations</a:t>
+            </a:r>
+            <a:endParaRPr lang="en-US" sz="1400" dirty="0"/>
+          </a:p>
+        </p:txBody>
+      </p:sp>
+      <p:sp>
+        <p:nvSpPr>
+          <p:cNvPr id="4" name="diagram frame"/>
+          <p:cNvSpPr/>
+          <p:nvPr/>
+        </p:nvSpPr>
+        <p:spPr>
+          <a:xfrm>
+            <a:off x="1541953" y="1463040"/>
+            <a:ext cx="9107790" cy="4937760"/>
+          </a:xfrm>
+          <a:prstGeom prst="rect">
+            <a:avLst/>
+          </a:prstGeom>
+          <a:solidFill>
+            <a:srgbClr val="FFFFFF"/>
+          </a:solidFill>
+          <a:ln w="9525">
+            <a:solidFill>
+              <a:srgbClr val="DFE3EA"/>
+            </a:solidFill>
+            <a:prstDash val="solid"/>
+          </a:ln>
+        </p:spPr>
+      </p:sp>
+      <p:pic>
+        <p:nvPicPr>
+          <p:cNvPr id="5" name="Image 0" descr="BPMN diagram of the loan process: a bank pool with five lanes between the Applicant and Credit Bureau pools">    </p:cNvPr>
+          <p:cNvPicPr>
+            <a:picLocks noChangeAspect="1"/>
+          </p:cNvPicPr>
+          <p:nvPr/>
+        </p:nvPicPr>
+        <p:blipFill>
+          <a:blip r:embed="rId1"/>
+          <a:stretch>
+            <a:fillRect/>
+          </a:stretch>
+        </p:blipFill>
+        <p:spPr>
+          <a:xfrm>
+            <a:off x="1633393" y="1554480"/>
+            <a:ext cx="8924910" cy="4754880"/>
+          </a:xfrm>
+          <a:prstGeom prst="rect">
+            <a:avLst/>
+          </a:prstGeom>
+        </p:spPr>
+      </p:pic>
+      <p:sp>
+        <p:nvSpPr>
+          <p:cNvPr id="25" name="Slide Number Placeholder 0"/>
+          <p:cNvSpPr>
+            <a:spLocks noGrp="1"/>
+          </p:cNvSpPr>
+          <p:nvPr>
+            <p:ph type="sldNum" sz="quarter" idx="4294967295"/>
+          </p:nvPr>
+        </p:nvSpPr>
+        <p:spPr>
+          <a:xfrm>
+            <a:off x="11155680" y="6400800"/>
+            <a:ext cx="457200" cy="274320"/>
+          </a:xfrm>
+          <a:prstGeom prst="rect">
+            <a:avLst/>
+          </a:prstGeom>
+          <a:extLst>
+            <a:ext uri="{C572A759-6A51-4108-AA02-DFA0A04FC94B}">
+              <ma14:wrappingTextBoxFlag xmlns:ma14="http://schemas.microsoft.com/office/mac/drawingml/2011/main" val="0"/>
+            </a:ext>
+          </a:extLst>
+        </p:spPr>
+        <p:txBody>
+          <a:bodyPr/>
+          <a:lstStyle>
+            <a:lvl1pPr>
+              <a:defRPr sz="1000">
+                <a:solidFill>
+                  <a:srgbClr val="5D6778"/>
+                </a:solidFill>
+                <a:latin typeface="Calibri"/>
+                <a:ea typeface="Calibri"/>
+                <a:cs typeface="Calibri"/>
+              </a:defRPr>
+            </a:lvl1pPr>
+          </a:lstStyle>
+          <a:p>
+            <a:pPr algn="r"/>
+            <a:fld id="{F7021451-1387-4CA6-816F-3879F97B5CBC}" type="slidenum">
+              <a:rPr b="0" lang="en-US"/>
+              <a:t>3</a:t>
+            </a:fld>
+            <a:endParaRPr lang="en-US"/>
+          </a:p>
+        </p:txBody>
+      </p:sp>
+    </p:spTree>
+  </p:cSld>
+  <p:clrMapOvr>
+    <a:masterClrMapping/>
+  </p:clrMapOvr>
+</p:sld>
+</file>
+
+<file path=ppt/slides/slide4.xml><?xml version="1.0" encoding="utf-8"?>
+<p:sld xmlns:a="http://schemas.openxmlformats.org/drawingml/2006/main" xmlns:r="http://schemas.openxmlformats.org/officeDocument/2006/relationships" xmlns:p="http://schemas.openxmlformats.org/presentationml/2006/main">
+  <p:cSld name="Slide 4">
+    <p:spTree>
+      <p:nvGrpSpPr>
+        <p:cNvPr id="1" name=""/>
+        <p:cNvGrpSpPr/>
+        <p:nvPr/>
+      </p:nvGrpSpPr>
+      <p:grpSpPr>
+        <a:xfrm>
+          <a:off x="0" y="0"/>
+          <a:ext cx="0" cy="0"/>
+          <a:chOff x="0" y="0"/>
+          <a:chExt cx="0" cy="0"/>
+        </a:xfrm>
+      </p:grpSpPr>
+      <p:sp>
+        <p:nvSpPr>
+          <p:cNvPr id="2" name="Text 0"/>
+          <p:cNvSpPr/>
+          <p:nvPr>
+            <p:ph idx="100" type="title" hasCustomPrompt="1"/>
+          </p:nvPr>
+        </p:nvSpPr>
+        <p:spPr>
+          <a:xfrm>
+            <a:off x="548640" y="320040"/>
+            <a:ext cx="11064240" cy="731520"/>
+          </a:xfrm>
+          <a:prstGeom prst="rect">
+            <a:avLst/>
+          </a:prstGeom>
+          <a:noFill/>
+          <a:ln/>
+        </p:spPr>
+        <p:txBody>
+          <a:bodyPr wrap="square" lIns="0" tIns="0" rIns="0" bIns="0" rtlCol="0" anchor="ctr"/>
+          <a:lstStyle/>
+          <a:p>
+            <a:pPr algn="l" indent="0" marL="0">
+              <a:buNone/>
+            </a:pPr>
+            <a:r>
+              <a:rPr lang="en-US" sz="3200" b="1" dirty="0">
+                <a:solidFill>
+                  <a:srgbClr val="13203A"/>
+                </a:solidFill>
+                <a:latin typeface="Cambria" pitchFamily="34" charset="0"/>
+                <a:ea typeface="Cambria" pitchFamily="34" charset="-122"/>
+                <a:cs typeface="Cambria" pitchFamily="34" charset="-120"/>
+              </a:rPr>
               <a:t>Task types used</a:t>
             </a:r>
             <a:endParaRPr lang="en-US" sz="3200" dirty="0"/>
@@ -2414,7 +3191,7 @@
       </p:sp>
       <p:graphicFrame>
         <p:nvGraphicFramePr>
-          <p:cNvPr id="4" name="Table 0"/>
+          <p:cNvPr id="5" name="Table 0"/>
           <p:cNvGraphicFramePr>
             <a:graphicFrameLocks noGrp="1"/>
           </p:cNvGraphicFramePr>
@@ -3846,7 +4623,7 @@
             <a:pPr algn="r"/>
             <a:fld id="{F7021451-1387-4CA6-816F-3879F97B5CBC}" type="slidenum">
               <a:rPr b="0" lang="en-US"/>
-              <a:t>3</a:t>
+              <a:t>4</a:t>
             </a:fld>
             <a:endParaRPr lang="en-US"/>
           </a:p>
@@ -3860,9 +4637,9 @@
 </p:sld>
 </file>
 
-<file path=ppt/slides/slide4.xml><?xml version="1.0" encoding="utf-8"?>
+<file path=ppt/slides/slide5.xml><?xml version="1.0" encoding="utf-8"?>
 <p:sld xmlns:a="http://schemas.openxmlformats.org/drawingml/2006/main" xmlns:r="http://schemas.openxmlformats.org/officeDocument/2006/relationships" xmlns:p="http://schemas.openxmlformats.org/presentationml/2006/main">
-  <p:cSld name="Slide 4">
+  <p:cSld name="Slide 5">
     <p:spTree>
       <p:nvGrpSpPr>
         <p:cNvPr id="1" name=""/>
@@ -4787,7 +5564,7 @@
             <a:pPr algn="r"/>
             <a:fld id="{F7021451-1387-4CA6-816F-3879F97B5CBC}" type="slidenum">
               <a:rPr b="0" lang="en-US"/>
-              <a:t>4</a:t>
+              <a:t>5</a:t>
             </a:fld>
             <a:endParaRPr lang="en-US"/>
           </a:p>
@@ -4801,9 +5578,9 @@
 </p:sld>
 </file>
 
-<file path=ppt/slides/slide5.xml><?xml version="1.0" encoding="utf-8"?>
+<file path=ppt/slides/slide6.xml><?xml version="1.0" encoding="utf-8"?>
 <p:sld xmlns:a="http://schemas.openxmlformats.org/drawingml/2006/main" xmlns:r="http://schemas.openxmlformats.org/officeDocument/2006/relationships" xmlns:p="http://schemas.openxmlformats.org/presentationml/2006/main">
-  <p:cSld name="Slide 5">
+  <p:cSld name="Slide 6">
     <p:spTree>
       <p:nvGrpSpPr>
         <p:cNvPr id="1" name=""/>
@@ -4861,7 +5638,7 @@
       </p:sp>
       <p:graphicFrame>
         <p:nvGraphicFramePr>
-          <p:cNvPr id="6" name="Table 0"/>
+          <p:cNvPr id="7" name="Table 0"/>
           <p:cNvGraphicFramePr>
             <a:graphicFrameLocks noGrp="1"/>
           </p:cNvGraphicFramePr>
@@ -6887,7 +7664,7 @@
             <a:pPr algn="r"/>
             <a:fld id="{F7021451-1387-4CA6-816F-3879F97B5CBC}" type="slidenum">
               <a:rPr b="0" lang="en-US"/>
-              <a:t>5</a:t>
+              <a:t>6</a:t>
             </a:fld>
             <a:endParaRPr lang="en-US"/>
           </a:p>
@@ -6901,9 +7678,9 @@
 </p:sld>
 </file>
 
-<file path=ppt/slides/slide6.xml><?xml version="1.0" encoding="utf-8"?>
+<file path=ppt/slides/slide7.xml><?xml version="1.0" encoding="utf-8"?>
 <p:sld xmlns:a="http://schemas.openxmlformats.org/drawingml/2006/main" xmlns:r="http://schemas.openxmlformats.org/officeDocument/2006/relationships" xmlns:p="http://schemas.openxmlformats.org/presentationml/2006/main">
-  <p:cSld name="Slide 6">
+  <p:cSld name="Slide 7">
     <p:spTree>
       <p:nvGrpSpPr>
         <p:cNvPr id="1" name=""/>
@@ -8162,7 +8939,7 @@
             <a:pPr algn="r"/>
             <a:fld id="{F7021451-1387-4CA6-816F-3879F97B5CBC}" type="slidenum">
               <a:rPr b="0" lang="en-US"/>
-              <a:t>6</a:t>
+              <a:t>7</a:t>
             </a:fld>
             <a:endParaRPr lang="en-US"/>
           </a:p>
@@ -8176,9 +8953,9 @@
 </p:sld>
 </file>
 
-<file path=ppt/slides/slide7.xml><?xml version="1.0" encoding="utf-8"?>
+<file path=ppt/slides/slide8.xml><?xml version="1.0" encoding="utf-8"?>
 <p:sld xmlns:a="http://schemas.openxmlformats.org/drawingml/2006/main" xmlns:r="http://schemas.openxmlformats.org/officeDocument/2006/relationships" xmlns:p="http://schemas.openxmlformats.org/presentationml/2006/main">
-  <p:cSld name="Slide 7">
+  <p:cSld name="Slide 8">
     <p:spTree>
       <p:nvGrpSpPr>
         <p:cNvPr id="1" name=""/>
@@ -8236,7 +9013,7 @@
       </p:sp>
       <p:graphicFrame>
         <p:nvGraphicFramePr>
-          <p:cNvPr id="8" name="Table 0"/>
+          <p:cNvPr id="9" name="Table 0"/>
           <p:cNvGraphicFramePr>
             <a:graphicFrameLocks noGrp="1"/>
           </p:cNvGraphicFramePr>
@@ -10573,7 +11350,7 @@
             <a:pPr algn="r"/>
             <a:fld id="{F7021451-1387-4CA6-816F-3879F97B5CBC}" type="slidenum">
               <a:rPr b="0" lang="en-US"/>
-              <a:t>7</a:t>
+              <a:t>8</a:t>
             </a:fld>
             <a:endParaRPr lang="en-US"/>
           </a:p>
@@ -10587,9 +11364,9 @@
 </p:sld>
 </file>
 
-<file path=ppt/slides/slide8.xml><?xml version="1.0" encoding="utf-8"?>
+<file path=ppt/slides/slide9.xml><?xml version="1.0" encoding="utf-8"?>
 <p:sld xmlns:a="http://schemas.openxmlformats.org/drawingml/2006/main" xmlns:r="http://schemas.openxmlformats.org/officeDocument/2006/relationships" xmlns:p="http://schemas.openxmlformats.org/presentationml/2006/main">
-  <p:cSld name="Slide 8">
+  <p:cSld name="Slide 9">
     <p:spTree>
       <p:nvGrpSpPr>
         <p:cNvPr id="1" name=""/>
@@ -10931,7 +11708,7 @@
                 <a:ea typeface="Cambria" pitchFamily="34" charset="-122"/>
                 <a:cs typeface="Cambria" pitchFamily="34" charset="-120"/>
               </a:rPr>
-              <a:t>Thank you  ·  Questions?</a:t>
+              <a:t>Thank you</a:t>
             </a:r>
             <a:endParaRPr lang="en-US" sz="2200" dirty="0"/>
           </a:p>

--- a/Assignment3_Loan/Loan_Presentation.pptx
+++ b/Assignment3_Loan/Loan_Presentation.pptx
@@ -115,31 +115,31 @@
   <p:extLst>
     <p:ext uri="{521415D9-36F7-43E2-AB2F-B90AF26B5E84}">
       <p14:sectionLst xmlns:p14="http://schemas.microsoft.com/office/powerpoint/2010/main">
-        <p14:section name="Introduction" id="{bf31ef41-e566-4315-449b-782f73adae74}">
+        <p14:section name="Introduction" id="{23148770-bdeb-20e1-d3ac-6cf424bd6c12}">
           <p14:sldIdLst>
             <p14:sldId id="256"/>
             <p14:sldId id="257"/>
           </p14:sldIdLst>
         </p14:section>
-        <p14:section name="Process" id="{4e4d1b71-0ace-c4fb-0a1f-d1b97fe02f1d}">
+        <p14:section name="Process" id="{93c135b5-e81d-631a-d7f5-24c1e8c1b7b9}">
           <p14:sldIdLst>
             <p14:sldId id="258"/>
           </p14:sldIdLst>
         </p14:section>
-        <p14:section name="Task types, gateways and events" id="{94626242-844e-d9e7-068c-1625ee4d56b7}">
+        <p14:section name="Task types, gateways and events" id="{6d6b8c52-4124-5b19-c3a9-ebd53721be6a}">
           <p14:sldIdLst>
             <p14:sldId id="259"/>
             <p14:sldId id="260"/>
             <p14:sldId id="261"/>
           </p14:sldIdLst>
         </p14:section>
-        <p14:section name="Critical and alternate paths" id="{5711a2b0-82e2-8a56-c369-1ac57b7839ab}">
+        <p14:section name="Critical and alternate paths" id="{588c0ebb-cc8a-ae44-8b60-f21f407677a4}">
           <p14:sldIdLst>
             <p14:sldId id="262"/>
             <p14:sldId id="263"/>
           </p14:sldIdLst>
         </p14:section>
-        <p14:section name="Summary" id="{fe2c2434-2284-1442-2b3f-2107451b29dd}">
+        <p14:section name="Summary" id="{8bf7da35-fcc5-3555-91d9-80d0eb8f5fdb}">
           <p14:sldIdLst>
             <p14:sldId id="264"/>
           </p14:sldIdLst>
@@ -2200,42 +2200,6 @@
             <a:prstDash val="solid"/>
           </a:ln>
         </p:spPr>
-      </p:sp>
-      <p:sp>
-        <p:nvSpPr>
-          <p:cNvPr id="11" name="Text 9"/>
-          <p:cNvSpPr txBox="1"/>
-          <p:nvPr/>
-        </p:nvSpPr>
-        <p:spPr>
-          <a:xfrm>
-            <a:off x="731520" y="5669280"/>
-            <a:ext cx="10698480" cy="365760"/>
-          </a:xfrm>
-          <a:prstGeom prst="rect">
-            <a:avLst/>
-          </a:prstGeom>
-          <a:noFill/>
-          <a:ln/>
-        </p:spPr>
-        <p:txBody>
-          <a:bodyPr wrap="square" lIns="0" tIns="0" rIns="0" bIns="0" rtlCol="0" anchor="ctr"/>
-          <a:lstStyle/>
-          <a:p>
-            <a:pPr indent="0" marL="0">
-              <a:buNone/>
-            </a:pPr>
-            <a:r>
-              <a:rPr lang="en-US" sz="1600" dirty="0">
-                <a:solidFill>
-                  <a:srgbClr val="C9D2E0"/>
-                </a:solidFill>
-              </a:rPr>
-              <a:t>[Your name]  ·  [Roll number]  ·  [Course]</a:t>
-            </a:r>
-            <a:endParaRPr lang="en-US" sz="1600" dirty="0"/>
-          </a:p>
-        </p:txBody>
       </p:sp>
     </p:spTree>
   </p:cSld>
